--- a/m3/diapositivos/sessao-03-m3-f04.pptx
+++ b/m3/diapositivos/sessao-03-m3-f04.pptx
@@ -1872,9 +1872,6 @@
               <a:lnSpc>
                 <a:spcPct val="120000"/>
               </a:lnSpc>
-              <a:spcAft>
-                <a:spcPts val="1000"/>
-              </a:spcAft>
               <a:buNone/>
             </a:pPr>
             <a:r>
@@ -1886,22 +1883,16 @@
                 <a:ea typeface="Georgia" pitchFamily="34" charset="-122"/>
                 <a:cs typeface="Georgia" pitchFamily="34" charset="-120"/>
               </a:rPr>
-              <a:t>Escolham um objeto ligado às navegações (astrolábio, mapa, padrão, especiaria, carta, caravela…).</a:t>
-            </a:r>
-            <a:endParaRPr lang="en-US" sz="2300" dirty="0"/>
-          </a:p>
-          <a:p>
+              <a:t>Escolham um objeto ligado às navegações (astrolábio, mapa, padrão, especiaria, carta, caravela…). </a:t>
+            </a:r>
             <a:pPr indent="0" marL="0">
               <a:lnSpc>
                 <a:spcPct val="120000"/>
               </a:lnSpc>
-              <a:spcAft>
-                <a:spcPts val="1000"/>
-              </a:spcAft>
-              <a:buNone/>
-            </a:pPr>
-            <a:r>
-              <a:rPr lang="en-US" sz="2300" dirty="0">
+              <a:buNone/>
+            </a:pPr>
+            <a:r>
+              <a:rPr lang="en-US" sz="2300" b="1" dirty="0">
                 <a:solidFill>
                   <a:srgbClr val="F2F0EA"/>
                 </a:solidFill>
@@ -1909,7 +1900,58 @@
                 <a:ea typeface="Georgia" pitchFamily="34" charset="-122"/>
                 <a:cs typeface="Georgia" pitchFamily="34" charset="-120"/>
               </a:rPr>
-              <a:t>Recriem-no com olhar crítico: um objeto, imagem ou peça que mostre a história oficial e a que ficou por contar. Juntem-lhe uma etiqueta de museu (80–100 palavras) com uma fonte verificada.</a:t>
+              <a:t>Recriem-no com olhar crítico</a:t>
+            </a:r>
+            <a:pPr indent="0" marL="0">
+              <a:lnSpc>
+                <a:spcPct val="120000"/>
+              </a:lnSpc>
+              <a:buNone/>
+            </a:pPr>
+            <a:r>
+              <a:rPr lang="en-US" sz="2300" dirty="0">
+                <a:solidFill>
+                  <a:srgbClr val="F2F0EA"/>
+                </a:solidFill>
+                <a:latin typeface="Georgia" pitchFamily="34" charset="0"/>
+                <a:ea typeface="Georgia" pitchFamily="34" charset="-122"/>
+                <a:cs typeface="Georgia" pitchFamily="34" charset="-120"/>
+              </a:rPr>
+              <a:t>: um objeto, imagem ou peça que mostre a história oficial e a que ficou por contar. Juntem-lhe uma </a:t>
+            </a:r>
+            <a:pPr indent="0" marL="0">
+              <a:lnSpc>
+                <a:spcPct val="120000"/>
+              </a:lnSpc>
+              <a:buNone/>
+            </a:pPr>
+            <a:r>
+              <a:rPr lang="en-US" sz="2300" b="1" dirty="0">
+                <a:solidFill>
+                  <a:srgbClr val="F2F0EA"/>
+                </a:solidFill>
+                <a:latin typeface="Georgia" pitchFamily="34" charset="0"/>
+                <a:ea typeface="Georgia" pitchFamily="34" charset="-122"/>
+                <a:cs typeface="Georgia" pitchFamily="34" charset="-120"/>
+              </a:rPr>
+              <a:t>etiqueta de museu</a:t>
+            </a:r>
+            <a:pPr indent="0" marL="0">
+              <a:lnSpc>
+                <a:spcPct val="120000"/>
+              </a:lnSpc>
+              <a:buNone/>
+            </a:pPr>
+            <a:r>
+              <a:rPr lang="en-US" sz="2300" dirty="0">
+                <a:solidFill>
+                  <a:srgbClr val="F2F0EA"/>
+                </a:solidFill>
+                <a:latin typeface="Georgia" pitchFamily="34" charset="0"/>
+                <a:ea typeface="Georgia" pitchFamily="34" charset="-122"/>
+                <a:cs typeface="Georgia" pitchFamily="34" charset="-120"/>
+              </a:rPr>
+              <a:t> (80–100 palavras) com uma fonte verificada.</a:t>
             </a:r>
             <a:endParaRPr lang="en-US" sz="2300" dirty="0"/>
           </a:p>
@@ -2424,7 +2466,41 @@
                 <a:ea typeface="Arial" pitchFamily="34" charset="-122"/>
                 <a:cs typeface="Arial" pitchFamily="34" charset="-120"/>
               </a:rPr>
-              <a:t>Em grupo, à maneira do Kit de Patrícia Lino, recrias um objeto com duas leituras e escreves uma etiqueta de museu de 80 a 100 palavras com fonte verificada.</a:t>
+              <a:t>Em grupo, à maneira do </a:t>
+            </a:r>
+            <a:pPr indent="0" marL="0">
+              <a:lnSpc>
+                <a:spcPct val="105000"/>
+              </a:lnSpc>
+              <a:buNone/>
+            </a:pPr>
+            <a:r>
+              <a:rPr lang="en-US" sz="2200" i="1" dirty="0">
+                <a:solidFill>
+                  <a:srgbClr val="F2F0EA"/>
+                </a:solidFill>
+                <a:latin typeface="Arial" pitchFamily="34" charset="0"/>
+                <a:ea typeface="Arial" pitchFamily="34" charset="-122"/>
+                <a:cs typeface="Arial" pitchFamily="34" charset="-120"/>
+              </a:rPr>
+              <a:t>Kit</a:t>
+            </a:r>
+            <a:pPr indent="0" marL="0">
+              <a:lnSpc>
+                <a:spcPct val="105000"/>
+              </a:lnSpc>
+              <a:buNone/>
+            </a:pPr>
+            <a:r>
+              <a:rPr lang="en-US" sz="2200" dirty="0">
+                <a:solidFill>
+                  <a:srgbClr val="F2F0EA"/>
+                </a:solidFill>
+                <a:latin typeface="Arial" pitchFamily="34" charset="0"/>
+                <a:ea typeface="Arial" pitchFamily="34" charset="-122"/>
+                <a:cs typeface="Arial" pitchFamily="34" charset="-120"/>
+              </a:rPr>
+              <a:t> de Patrícia Lino, recrias um objeto com duas leituras e escreves uma etiqueta de museu de 80 a 100 palavras com fonte verificada.</a:t>
             </a:r>
             <a:endParaRPr lang="en-US" sz="2200" dirty="0"/>
           </a:p>
